--- a/public/videos/repositories/kuruma-kaitori-kuchikomi/kuruma-kaitori-kuchikomi-tech-preview.pptx
+++ b/public/videos/repositories/kuruma-kaitori-kuchikomi/kuruma-kaitori-kuchikomi-tech-preview.pptx
@@ -134,7 +134,7 @@
           <p:cNvPr id="2" name="タイトル 1">
             <a:extLst>
               <a:ext uri="{FF2B5EF4-FFF2-40B4-BE49-F238E27FC236}">
-                <a16:creationId xmlns:a16="http://schemas.microsoft.com/office/drawing/2014/main" id="{BCB3F1ED-AFD2-8599-CA44-FFACF9B38765}"/>
+                <a16:creationId xmlns:a16="http://schemas.microsoft.com/office/drawing/2014/main" id="{6A768FDE-7DA9-19E4-C242-C78247FE7390}"/>
               </a:ext>
             </a:extLst>
           </p:cNvPr>
@@ -171,7 +171,7 @@
           <p:cNvPr id="3" name="字幕 2">
             <a:extLst>
               <a:ext uri="{FF2B5EF4-FFF2-40B4-BE49-F238E27FC236}">
-                <a16:creationId xmlns:a16="http://schemas.microsoft.com/office/drawing/2014/main" id="{A6B2CB49-B1A0-8C96-8DA1-B910FC7D307D}"/>
+                <a16:creationId xmlns:a16="http://schemas.microsoft.com/office/drawing/2014/main" id="{E65F00FC-C297-8C1F-6FD2-0268FA0D9EC3}"/>
               </a:ext>
             </a:extLst>
           </p:cNvPr>
@@ -241,7 +241,7 @@
           <p:cNvPr id="4" name="日付プレースホルダー 3">
             <a:extLst>
               <a:ext uri="{FF2B5EF4-FFF2-40B4-BE49-F238E27FC236}">
-                <a16:creationId xmlns:a16="http://schemas.microsoft.com/office/drawing/2014/main" id="{4CE49EFF-5562-DB61-6C17-80AB938A3D40}"/>
+                <a16:creationId xmlns:a16="http://schemas.microsoft.com/office/drawing/2014/main" id="{836A1C61-6325-2CC4-68D5-541252D50B7E}"/>
               </a:ext>
             </a:extLst>
           </p:cNvPr>
@@ -257,7 +257,7 @@
           <a:bodyPr/>
           <a:lstStyle/>
           <a:p>
-            <a:fld id="{E50A1A90-6580-437D-A9EF-B1C14ABC181D}" type="datetimeFigureOut">
+            <a:fld id="{BD358D7C-FF40-44A0-9CCA-82C00B9D490E}" type="datetimeFigureOut">
               <a:rPr kumimoji="1" lang="ja-JP" altLang="en-US" smtClean="0"/>
               <a:t>2026/7/30</a:t>
             </a:fld>
@@ -270,7 +270,7 @@
           <p:cNvPr id="5" name="フッター プレースホルダー 4">
             <a:extLst>
               <a:ext uri="{FF2B5EF4-FFF2-40B4-BE49-F238E27FC236}">
-                <a16:creationId xmlns:a16="http://schemas.microsoft.com/office/drawing/2014/main" id="{9417A882-4F5A-88A2-88B8-522BE8BB9565}"/>
+                <a16:creationId xmlns:a16="http://schemas.microsoft.com/office/drawing/2014/main" id="{9102A9DF-B99A-9809-5AC9-F55D8563F306}"/>
               </a:ext>
             </a:extLst>
           </p:cNvPr>
@@ -295,7 +295,7 @@
           <p:cNvPr id="6" name="スライド番号プレースホルダー 5">
             <a:extLst>
               <a:ext uri="{FF2B5EF4-FFF2-40B4-BE49-F238E27FC236}">
-                <a16:creationId xmlns:a16="http://schemas.microsoft.com/office/drawing/2014/main" id="{DD423F33-5C27-EAAD-1FD3-42C83590A6B9}"/>
+                <a16:creationId xmlns:a16="http://schemas.microsoft.com/office/drawing/2014/main" id="{9AD29488-003B-0884-5EA3-6D8877B8D4F5}"/>
               </a:ext>
             </a:extLst>
           </p:cNvPr>
@@ -311,7 +311,7 @@
           <a:bodyPr/>
           <a:lstStyle/>
           <a:p>
-            <a:fld id="{A5097284-7268-4A6F-8A30-803EBC071BDE}" type="slidenum">
+            <a:fld id="{617B1015-0A55-49B0-9136-CCD481C01AE8}" type="slidenum">
               <a:rPr kumimoji="1" lang="ja-JP" altLang="en-US" smtClean="0"/>
               <a:t>‹#›</a:t>
             </a:fld>
@@ -322,7 +322,7 @@
     </p:spTree>
     <p:extLst>
       <p:ext uri="{BB962C8B-B14F-4D97-AF65-F5344CB8AC3E}">
-        <p14:creationId xmlns:p14="http://schemas.microsoft.com/office/powerpoint/2010/main" val="3196640391"/>
+        <p14:creationId xmlns:p14="http://schemas.microsoft.com/office/powerpoint/2010/main" val="1794045017"/>
       </p:ext>
     </p:extLst>
   </p:cSld>
@@ -354,7 +354,7 @@
           <p:cNvPr id="2" name="タイトル 1">
             <a:extLst>
               <a:ext uri="{FF2B5EF4-FFF2-40B4-BE49-F238E27FC236}">
-                <a16:creationId xmlns:a16="http://schemas.microsoft.com/office/drawing/2014/main" id="{FAD34068-F409-B7EE-D502-FA8E9042A765}"/>
+                <a16:creationId xmlns:a16="http://schemas.microsoft.com/office/drawing/2014/main" id="{E3BE35F7-E45A-C85B-5170-581761EEE79D}"/>
               </a:ext>
             </a:extLst>
           </p:cNvPr>
@@ -382,7 +382,7 @@
           <p:cNvPr id="3" name="縦書きテキスト プレースホルダー 2">
             <a:extLst>
               <a:ext uri="{FF2B5EF4-FFF2-40B4-BE49-F238E27FC236}">
-                <a16:creationId xmlns:a16="http://schemas.microsoft.com/office/drawing/2014/main" id="{A359E43A-292C-7275-5B54-38D4A12E9791}"/>
+                <a16:creationId xmlns:a16="http://schemas.microsoft.com/office/drawing/2014/main" id="{2511ACA8-520A-8540-04F0-4D332322079C}"/>
               </a:ext>
             </a:extLst>
           </p:cNvPr>
@@ -471,7 +471,7 @@
           <p:cNvPr id="4" name="日付プレースホルダー 3">
             <a:extLst>
               <a:ext uri="{FF2B5EF4-FFF2-40B4-BE49-F238E27FC236}">
-                <a16:creationId xmlns:a16="http://schemas.microsoft.com/office/drawing/2014/main" id="{1E795387-58CE-5776-C35E-8589FADBCE6A}"/>
+                <a16:creationId xmlns:a16="http://schemas.microsoft.com/office/drawing/2014/main" id="{4041C71B-E40C-2F7C-628C-05DE419AF12E}"/>
               </a:ext>
             </a:extLst>
           </p:cNvPr>
@@ -487,7 +487,7 @@
           <a:bodyPr/>
           <a:lstStyle/>
           <a:p>
-            <a:fld id="{E50A1A90-6580-437D-A9EF-B1C14ABC181D}" type="datetimeFigureOut">
+            <a:fld id="{BD358D7C-FF40-44A0-9CCA-82C00B9D490E}" type="datetimeFigureOut">
               <a:rPr kumimoji="1" lang="ja-JP" altLang="en-US" smtClean="0"/>
               <a:t>2026/7/30</a:t>
             </a:fld>
@@ -500,7 +500,7 @@
           <p:cNvPr id="5" name="フッター プレースホルダー 4">
             <a:extLst>
               <a:ext uri="{FF2B5EF4-FFF2-40B4-BE49-F238E27FC236}">
-                <a16:creationId xmlns:a16="http://schemas.microsoft.com/office/drawing/2014/main" id="{6D67EA56-7383-0630-AC3F-050DF36C9844}"/>
+                <a16:creationId xmlns:a16="http://schemas.microsoft.com/office/drawing/2014/main" id="{2B7F4AE1-C4C3-F94E-3EA7-3BC20A8CF42E}"/>
               </a:ext>
             </a:extLst>
           </p:cNvPr>
@@ -525,7 +525,7 @@
           <p:cNvPr id="6" name="スライド番号プレースホルダー 5">
             <a:extLst>
               <a:ext uri="{FF2B5EF4-FFF2-40B4-BE49-F238E27FC236}">
-                <a16:creationId xmlns:a16="http://schemas.microsoft.com/office/drawing/2014/main" id="{D6C6F6CB-5988-114C-40C2-42DDC35B638C}"/>
+                <a16:creationId xmlns:a16="http://schemas.microsoft.com/office/drawing/2014/main" id="{6A6DDCB5-5F8F-65FB-BC27-E8187F5D2B5D}"/>
               </a:ext>
             </a:extLst>
           </p:cNvPr>
@@ -541,7 +541,7 @@
           <a:bodyPr/>
           <a:lstStyle/>
           <a:p>
-            <a:fld id="{A5097284-7268-4A6F-8A30-803EBC071BDE}" type="slidenum">
+            <a:fld id="{617B1015-0A55-49B0-9136-CCD481C01AE8}" type="slidenum">
               <a:rPr kumimoji="1" lang="ja-JP" altLang="en-US" smtClean="0"/>
               <a:t>‹#›</a:t>
             </a:fld>
@@ -552,7 +552,7 @@
     </p:spTree>
     <p:extLst>
       <p:ext uri="{BB962C8B-B14F-4D97-AF65-F5344CB8AC3E}">
-        <p14:creationId xmlns:p14="http://schemas.microsoft.com/office/powerpoint/2010/main" val="2009667080"/>
+        <p14:creationId xmlns:p14="http://schemas.microsoft.com/office/powerpoint/2010/main" val="2608403111"/>
       </p:ext>
     </p:extLst>
   </p:cSld>
@@ -584,7 +584,7 @@
           <p:cNvPr id="2" name="縦書きタイトル 1">
             <a:extLst>
               <a:ext uri="{FF2B5EF4-FFF2-40B4-BE49-F238E27FC236}">
-                <a16:creationId xmlns:a16="http://schemas.microsoft.com/office/drawing/2014/main" id="{86547647-448E-C145-ED44-97B9459A967B}"/>
+                <a16:creationId xmlns:a16="http://schemas.microsoft.com/office/drawing/2014/main" id="{A1D8B378-E590-C34E-5D1A-78F4E25DCFF8}"/>
               </a:ext>
             </a:extLst>
           </p:cNvPr>
@@ -617,7 +617,7 @@
           <p:cNvPr id="3" name="縦書きテキスト プレースホルダー 2">
             <a:extLst>
               <a:ext uri="{FF2B5EF4-FFF2-40B4-BE49-F238E27FC236}">
-                <a16:creationId xmlns:a16="http://schemas.microsoft.com/office/drawing/2014/main" id="{83EC091C-561B-4057-1191-2673280C1077}"/>
+                <a16:creationId xmlns:a16="http://schemas.microsoft.com/office/drawing/2014/main" id="{5F6F059A-905A-4C0E-2761-D464A4EEB7A2}"/>
               </a:ext>
             </a:extLst>
           </p:cNvPr>
@@ -711,7 +711,7 @@
           <p:cNvPr id="4" name="日付プレースホルダー 3">
             <a:extLst>
               <a:ext uri="{FF2B5EF4-FFF2-40B4-BE49-F238E27FC236}">
-                <a16:creationId xmlns:a16="http://schemas.microsoft.com/office/drawing/2014/main" id="{4F5E7FAF-2A22-D985-AB00-9CA86B52F997}"/>
+                <a16:creationId xmlns:a16="http://schemas.microsoft.com/office/drawing/2014/main" id="{AEB84FB4-EF53-D20C-839E-C13E9E2F96D2}"/>
               </a:ext>
             </a:extLst>
           </p:cNvPr>
@@ -727,7 +727,7 @@
           <a:bodyPr/>
           <a:lstStyle/>
           <a:p>
-            <a:fld id="{E50A1A90-6580-437D-A9EF-B1C14ABC181D}" type="datetimeFigureOut">
+            <a:fld id="{BD358D7C-FF40-44A0-9CCA-82C00B9D490E}" type="datetimeFigureOut">
               <a:rPr kumimoji="1" lang="ja-JP" altLang="en-US" smtClean="0"/>
               <a:t>2026/7/30</a:t>
             </a:fld>
@@ -740,7 +740,7 @@
           <p:cNvPr id="5" name="フッター プレースホルダー 4">
             <a:extLst>
               <a:ext uri="{FF2B5EF4-FFF2-40B4-BE49-F238E27FC236}">
-                <a16:creationId xmlns:a16="http://schemas.microsoft.com/office/drawing/2014/main" id="{F8DF3E09-6156-8502-E7AC-EB20AD238067}"/>
+                <a16:creationId xmlns:a16="http://schemas.microsoft.com/office/drawing/2014/main" id="{1226E088-EE25-B4BB-8BC2-47F1F58A7A76}"/>
               </a:ext>
             </a:extLst>
           </p:cNvPr>
@@ -765,7 +765,7 @@
           <p:cNvPr id="6" name="スライド番号プレースホルダー 5">
             <a:extLst>
               <a:ext uri="{FF2B5EF4-FFF2-40B4-BE49-F238E27FC236}">
-                <a16:creationId xmlns:a16="http://schemas.microsoft.com/office/drawing/2014/main" id="{AF451EBD-C9D8-A401-E56F-0FE7FF017249}"/>
+                <a16:creationId xmlns:a16="http://schemas.microsoft.com/office/drawing/2014/main" id="{E3FFFF1A-8E40-541A-ABA4-9DBCE1F72011}"/>
               </a:ext>
             </a:extLst>
           </p:cNvPr>
@@ -781,7 +781,7 @@
           <a:bodyPr/>
           <a:lstStyle/>
           <a:p>
-            <a:fld id="{A5097284-7268-4A6F-8A30-803EBC071BDE}" type="slidenum">
+            <a:fld id="{617B1015-0A55-49B0-9136-CCD481C01AE8}" type="slidenum">
               <a:rPr kumimoji="1" lang="ja-JP" altLang="en-US" smtClean="0"/>
               <a:t>‹#›</a:t>
             </a:fld>
@@ -792,7 +792,7 @@
     </p:spTree>
     <p:extLst>
       <p:ext uri="{BB962C8B-B14F-4D97-AF65-F5344CB8AC3E}">
-        <p14:creationId xmlns:p14="http://schemas.microsoft.com/office/powerpoint/2010/main" val="1304581791"/>
+        <p14:creationId xmlns:p14="http://schemas.microsoft.com/office/powerpoint/2010/main" val="3987832351"/>
       </p:ext>
     </p:extLst>
   </p:cSld>
@@ -824,7 +824,7 @@
           <p:cNvPr id="2" name="タイトル 1">
             <a:extLst>
               <a:ext uri="{FF2B5EF4-FFF2-40B4-BE49-F238E27FC236}">
-                <a16:creationId xmlns:a16="http://schemas.microsoft.com/office/drawing/2014/main" id="{61F47672-92C7-6ECB-D8FB-98C97EFFC58E}"/>
+                <a16:creationId xmlns:a16="http://schemas.microsoft.com/office/drawing/2014/main" id="{AD4ED140-4C6D-57B1-0D6B-48AF4A9C580A}"/>
               </a:ext>
             </a:extLst>
           </p:cNvPr>
@@ -852,7 +852,7 @@
           <p:cNvPr id="3" name="コンテンツ プレースホルダー 2">
             <a:extLst>
               <a:ext uri="{FF2B5EF4-FFF2-40B4-BE49-F238E27FC236}">
-                <a16:creationId xmlns:a16="http://schemas.microsoft.com/office/drawing/2014/main" id="{5B090DC4-D4DE-9376-6B67-486810C448AB}"/>
+                <a16:creationId xmlns:a16="http://schemas.microsoft.com/office/drawing/2014/main" id="{FA8E32F0-B46D-D933-9791-0D02740C289D}"/>
               </a:ext>
             </a:extLst>
           </p:cNvPr>
@@ -941,7 +941,7 @@
           <p:cNvPr id="4" name="日付プレースホルダー 3">
             <a:extLst>
               <a:ext uri="{FF2B5EF4-FFF2-40B4-BE49-F238E27FC236}">
-                <a16:creationId xmlns:a16="http://schemas.microsoft.com/office/drawing/2014/main" id="{01023D75-B791-6DFE-BE29-ACF5BBB39129}"/>
+                <a16:creationId xmlns:a16="http://schemas.microsoft.com/office/drawing/2014/main" id="{A0B81A08-928E-C137-5A7A-003162261069}"/>
               </a:ext>
             </a:extLst>
           </p:cNvPr>
@@ -957,7 +957,7 @@
           <a:bodyPr/>
           <a:lstStyle/>
           <a:p>
-            <a:fld id="{E50A1A90-6580-437D-A9EF-B1C14ABC181D}" type="datetimeFigureOut">
+            <a:fld id="{BD358D7C-FF40-44A0-9CCA-82C00B9D490E}" type="datetimeFigureOut">
               <a:rPr kumimoji="1" lang="ja-JP" altLang="en-US" smtClean="0"/>
               <a:t>2026/7/30</a:t>
             </a:fld>
@@ -970,7 +970,7 @@
           <p:cNvPr id="5" name="フッター プレースホルダー 4">
             <a:extLst>
               <a:ext uri="{FF2B5EF4-FFF2-40B4-BE49-F238E27FC236}">
-                <a16:creationId xmlns:a16="http://schemas.microsoft.com/office/drawing/2014/main" id="{3E67CC19-78CC-9885-0AC6-A1CC2D1ECE34}"/>
+                <a16:creationId xmlns:a16="http://schemas.microsoft.com/office/drawing/2014/main" id="{5FD7DCC5-2F6F-C3F4-577F-16704CB52273}"/>
               </a:ext>
             </a:extLst>
           </p:cNvPr>
@@ -995,7 +995,7 @@
           <p:cNvPr id="6" name="スライド番号プレースホルダー 5">
             <a:extLst>
               <a:ext uri="{FF2B5EF4-FFF2-40B4-BE49-F238E27FC236}">
-                <a16:creationId xmlns:a16="http://schemas.microsoft.com/office/drawing/2014/main" id="{9076634E-3A8F-A443-268D-AD662A883249}"/>
+                <a16:creationId xmlns:a16="http://schemas.microsoft.com/office/drawing/2014/main" id="{859E6248-A539-8B34-7E64-4B6570609B15}"/>
               </a:ext>
             </a:extLst>
           </p:cNvPr>
@@ -1011,7 +1011,7 @@
           <a:bodyPr/>
           <a:lstStyle/>
           <a:p>
-            <a:fld id="{A5097284-7268-4A6F-8A30-803EBC071BDE}" type="slidenum">
+            <a:fld id="{617B1015-0A55-49B0-9136-CCD481C01AE8}" type="slidenum">
               <a:rPr kumimoji="1" lang="ja-JP" altLang="en-US" smtClean="0"/>
               <a:t>‹#›</a:t>
             </a:fld>
@@ -1022,7 +1022,7 @@
     </p:spTree>
     <p:extLst>
       <p:ext uri="{BB962C8B-B14F-4D97-AF65-F5344CB8AC3E}">
-        <p14:creationId xmlns:p14="http://schemas.microsoft.com/office/powerpoint/2010/main" val="1180060431"/>
+        <p14:creationId xmlns:p14="http://schemas.microsoft.com/office/powerpoint/2010/main" val="3256915832"/>
       </p:ext>
     </p:extLst>
   </p:cSld>
@@ -1054,7 +1054,7 @@
           <p:cNvPr id="2" name="タイトル 1">
             <a:extLst>
               <a:ext uri="{FF2B5EF4-FFF2-40B4-BE49-F238E27FC236}">
-                <a16:creationId xmlns:a16="http://schemas.microsoft.com/office/drawing/2014/main" id="{F875DBE0-A97C-F8C9-5C7E-1C62BCD548BC}"/>
+                <a16:creationId xmlns:a16="http://schemas.microsoft.com/office/drawing/2014/main" id="{D3B6FE0E-329C-B48D-13B0-EEEE80ADEF99}"/>
               </a:ext>
             </a:extLst>
           </p:cNvPr>
@@ -1091,7 +1091,7 @@
           <p:cNvPr id="3" name="テキスト プレースホルダー 2">
             <a:extLst>
               <a:ext uri="{FF2B5EF4-FFF2-40B4-BE49-F238E27FC236}">
-                <a16:creationId xmlns:a16="http://schemas.microsoft.com/office/drawing/2014/main" id="{AA771A84-8BED-0615-B596-CD36C9F7F453}"/>
+                <a16:creationId xmlns:a16="http://schemas.microsoft.com/office/drawing/2014/main" id="{E267100C-E928-FFB3-110F-779D888912D8}"/>
               </a:ext>
             </a:extLst>
           </p:cNvPr>
@@ -1216,7 +1216,7 @@
           <p:cNvPr id="4" name="日付プレースホルダー 3">
             <a:extLst>
               <a:ext uri="{FF2B5EF4-FFF2-40B4-BE49-F238E27FC236}">
-                <a16:creationId xmlns:a16="http://schemas.microsoft.com/office/drawing/2014/main" id="{6A07C7F9-4A5E-97EC-08D1-F0C57F0DF2FD}"/>
+                <a16:creationId xmlns:a16="http://schemas.microsoft.com/office/drawing/2014/main" id="{74160C7B-63E8-A9DF-1D65-06D0AD59187A}"/>
               </a:ext>
             </a:extLst>
           </p:cNvPr>
@@ -1232,7 +1232,7 @@
           <a:bodyPr/>
           <a:lstStyle/>
           <a:p>
-            <a:fld id="{E50A1A90-6580-437D-A9EF-B1C14ABC181D}" type="datetimeFigureOut">
+            <a:fld id="{BD358D7C-FF40-44A0-9CCA-82C00B9D490E}" type="datetimeFigureOut">
               <a:rPr kumimoji="1" lang="ja-JP" altLang="en-US" smtClean="0"/>
               <a:t>2026/7/30</a:t>
             </a:fld>
@@ -1245,7 +1245,7 @@
           <p:cNvPr id="5" name="フッター プレースホルダー 4">
             <a:extLst>
               <a:ext uri="{FF2B5EF4-FFF2-40B4-BE49-F238E27FC236}">
-                <a16:creationId xmlns:a16="http://schemas.microsoft.com/office/drawing/2014/main" id="{BFC44AE6-1DFF-D6E6-A673-97C56B711AE8}"/>
+                <a16:creationId xmlns:a16="http://schemas.microsoft.com/office/drawing/2014/main" id="{75F6F1F9-65CC-9B23-D1B0-3FC8605C6518}"/>
               </a:ext>
             </a:extLst>
           </p:cNvPr>
@@ -1270,7 +1270,7 @@
           <p:cNvPr id="6" name="スライド番号プレースホルダー 5">
             <a:extLst>
               <a:ext uri="{FF2B5EF4-FFF2-40B4-BE49-F238E27FC236}">
-                <a16:creationId xmlns:a16="http://schemas.microsoft.com/office/drawing/2014/main" id="{935169FB-85CA-F9F3-427A-776072D13987}"/>
+                <a16:creationId xmlns:a16="http://schemas.microsoft.com/office/drawing/2014/main" id="{4990FBCA-D72F-E186-6450-4F076EC0FF3F}"/>
               </a:ext>
             </a:extLst>
           </p:cNvPr>
@@ -1286,7 +1286,7 @@
           <a:bodyPr/>
           <a:lstStyle/>
           <a:p>
-            <a:fld id="{A5097284-7268-4A6F-8A30-803EBC071BDE}" type="slidenum">
+            <a:fld id="{617B1015-0A55-49B0-9136-CCD481C01AE8}" type="slidenum">
               <a:rPr kumimoji="1" lang="ja-JP" altLang="en-US" smtClean="0"/>
               <a:t>‹#›</a:t>
             </a:fld>
@@ -1297,7 +1297,7 @@
     </p:spTree>
     <p:extLst>
       <p:ext uri="{BB962C8B-B14F-4D97-AF65-F5344CB8AC3E}">
-        <p14:creationId xmlns:p14="http://schemas.microsoft.com/office/powerpoint/2010/main" val="343462712"/>
+        <p14:creationId xmlns:p14="http://schemas.microsoft.com/office/powerpoint/2010/main" val="1783889877"/>
       </p:ext>
     </p:extLst>
   </p:cSld>
@@ -1329,7 +1329,7 @@
           <p:cNvPr id="2" name="タイトル 1">
             <a:extLst>
               <a:ext uri="{FF2B5EF4-FFF2-40B4-BE49-F238E27FC236}">
-                <a16:creationId xmlns:a16="http://schemas.microsoft.com/office/drawing/2014/main" id="{206D3FAB-2B33-35CE-90E2-B980D3F36976}"/>
+                <a16:creationId xmlns:a16="http://schemas.microsoft.com/office/drawing/2014/main" id="{CB99A65D-B893-9A44-8D6C-F7DD9E67CFA6}"/>
               </a:ext>
             </a:extLst>
           </p:cNvPr>
@@ -1357,7 +1357,7 @@
           <p:cNvPr id="3" name="コンテンツ プレースホルダー 2">
             <a:extLst>
               <a:ext uri="{FF2B5EF4-FFF2-40B4-BE49-F238E27FC236}">
-                <a16:creationId xmlns:a16="http://schemas.microsoft.com/office/drawing/2014/main" id="{46680739-5405-766C-5F20-E35885F4605C}"/>
+                <a16:creationId xmlns:a16="http://schemas.microsoft.com/office/drawing/2014/main" id="{5E38D393-A1A9-3A41-A88D-560D330CCB15}"/>
               </a:ext>
             </a:extLst>
           </p:cNvPr>
@@ -1451,7 +1451,7 @@
           <p:cNvPr id="4" name="コンテンツ プレースホルダー 3">
             <a:extLst>
               <a:ext uri="{FF2B5EF4-FFF2-40B4-BE49-F238E27FC236}">
-                <a16:creationId xmlns:a16="http://schemas.microsoft.com/office/drawing/2014/main" id="{7B6E4F20-E8DD-C131-EFA4-170A5D277777}"/>
+                <a16:creationId xmlns:a16="http://schemas.microsoft.com/office/drawing/2014/main" id="{93877D96-B2DD-CDD4-85B5-47F2D1A4BD29}"/>
               </a:ext>
             </a:extLst>
           </p:cNvPr>
@@ -1545,7 +1545,7 @@
           <p:cNvPr id="5" name="日付プレースホルダー 4">
             <a:extLst>
               <a:ext uri="{FF2B5EF4-FFF2-40B4-BE49-F238E27FC236}">
-                <a16:creationId xmlns:a16="http://schemas.microsoft.com/office/drawing/2014/main" id="{06D52BF7-1068-1D7F-5D57-FB4198342C41}"/>
+                <a16:creationId xmlns:a16="http://schemas.microsoft.com/office/drawing/2014/main" id="{1280D22F-4C6F-7A8F-0EEB-2C4D9335BD7C}"/>
               </a:ext>
             </a:extLst>
           </p:cNvPr>
@@ -1561,7 +1561,7 @@
           <a:bodyPr/>
           <a:lstStyle/>
           <a:p>
-            <a:fld id="{E50A1A90-6580-437D-A9EF-B1C14ABC181D}" type="datetimeFigureOut">
+            <a:fld id="{BD358D7C-FF40-44A0-9CCA-82C00B9D490E}" type="datetimeFigureOut">
               <a:rPr kumimoji="1" lang="ja-JP" altLang="en-US" smtClean="0"/>
               <a:t>2026/7/30</a:t>
             </a:fld>
@@ -1574,7 +1574,7 @@
           <p:cNvPr id="6" name="フッター プレースホルダー 5">
             <a:extLst>
               <a:ext uri="{FF2B5EF4-FFF2-40B4-BE49-F238E27FC236}">
-                <a16:creationId xmlns:a16="http://schemas.microsoft.com/office/drawing/2014/main" id="{5F28AD74-6B1E-A0C9-A49D-3198FCD190C2}"/>
+                <a16:creationId xmlns:a16="http://schemas.microsoft.com/office/drawing/2014/main" id="{460DBAD9-DF7F-031D-E4C3-48584DA2CBBE}"/>
               </a:ext>
             </a:extLst>
           </p:cNvPr>
@@ -1599,7 +1599,7 @@
           <p:cNvPr id="7" name="スライド番号プレースホルダー 6">
             <a:extLst>
               <a:ext uri="{FF2B5EF4-FFF2-40B4-BE49-F238E27FC236}">
-                <a16:creationId xmlns:a16="http://schemas.microsoft.com/office/drawing/2014/main" id="{C23FDF8D-EBEF-84F5-8DED-CD77F5489E61}"/>
+                <a16:creationId xmlns:a16="http://schemas.microsoft.com/office/drawing/2014/main" id="{0DBD719A-16D5-12CA-F514-0247CF5598F9}"/>
               </a:ext>
             </a:extLst>
           </p:cNvPr>
@@ -1615,7 +1615,7 @@
           <a:bodyPr/>
           <a:lstStyle/>
           <a:p>
-            <a:fld id="{A5097284-7268-4A6F-8A30-803EBC071BDE}" type="slidenum">
+            <a:fld id="{617B1015-0A55-49B0-9136-CCD481C01AE8}" type="slidenum">
               <a:rPr kumimoji="1" lang="ja-JP" altLang="en-US" smtClean="0"/>
               <a:t>‹#›</a:t>
             </a:fld>
@@ -1626,7 +1626,7 @@
     </p:spTree>
     <p:extLst>
       <p:ext uri="{BB962C8B-B14F-4D97-AF65-F5344CB8AC3E}">
-        <p14:creationId xmlns:p14="http://schemas.microsoft.com/office/powerpoint/2010/main" val="2903385847"/>
+        <p14:creationId xmlns:p14="http://schemas.microsoft.com/office/powerpoint/2010/main" val="1942556136"/>
       </p:ext>
     </p:extLst>
   </p:cSld>
@@ -1658,7 +1658,7 @@
           <p:cNvPr id="2" name="タイトル 1">
             <a:extLst>
               <a:ext uri="{FF2B5EF4-FFF2-40B4-BE49-F238E27FC236}">
-                <a16:creationId xmlns:a16="http://schemas.microsoft.com/office/drawing/2014/main" id="{CCE9A94E-9A1A-7B79-0BB4-7D73EF4EAA20}"/>
+                <a16:creationId xmlns:a16="http://schemas.microsoft.com/office/drawing/2014/main" id="{E1EE89B1-B81C-7854-9D56-36FDD4DCAAE0}"/>
               </a:ext>
             </a:extLst>
           </p:cNvPr>
@@ -1691,7 +1691,7 @@
           <p:cNvPr id="3" name="テキスト プレースホルダー 2">
             <a:extLst>
               <a:ext uri="{FF2B5EF4-FFF2-40B4-BE49-F238E27FC236}">
-                <a16:creationId xmlns:a16="http://schemas.microsoft.com/office/drawing/2014/main" id="{CBD12BF2-7EBF-C39E-F7A2-D88EFFB58C55}"/>
+                <a16:creationId xmlns:a16="http://schemas.microsoft.com/office/drawing/2014/main" id="{7F1C7A73-44B3-0002-D297-F3EAA1944D1C}"/>
               </a:ext>
             </a:extLst>
           </p:cNvPr>
@@ -1762,7 +1762,7 @@
           <p:cNvPr id="4" name="コンテンツ プレースホルダー 3">
             <a:extLst>
               <a:ext uri="{FF2B5EF4-FFF2-40B4-BE49-F238E27FC236}">
-                <a16:creationId xmlns:a16="http://schemas.microsoft.com/office/drawing/2014/main" id="{C4CE7C1A-74F1-E298-C42B-282A70B2246A}"/>
+                <a16:creationId xmlns:a16="http://schemas.microsoft.com/office/drawing/2014/main" id="{6C0E8557-2B2A-41F5-A360-71CDD84AF802}"/>
               </a:ext>
             </a:extLst>
           </p:cNvPr>
@@ -1856,7 +1856,7 @@
           <p:cNvPr id="5" name="テキスト プレースホルダー 4">
             <a:extLst>
               <a:ext uri="{FF2B5EF4-FFF2-40B4-BE49-F238E27FC236}">
-                <a16:creationId xmlns:a16="http://schemas.microsoft.com/office/drawing/2014/main" id="{09B23D59-E698-5574-794C-FAC69EF79765}"/>
+                <a16:creationId xmlns:a16="http://schemas.microsoft.com/office/drawing/2014/main" id="{5A3D8158-6768-958C-8517-76A85EF29B94}"/>
               </a:ext>
             </a:extLst>
           </p:cNvPr>
@@ -1927,7 +1927,7 @@
           <p:cNvPr id="6" name="コンテンツ プレースホルダー 5">
             <a:extLst>
               <a:ext uri="{FF2B5EF4-FFF2-40B4-BE49-F238E27FC236}">
-                <a16:creationId xmlns:a16="http://schemas.microsoft.com/office/drawing/2014/main" id="{71F81645-4309-DDC2-2E56-F5AF25E7A7A8}"/>
+                <a16:creationId xmlns:a16="http://schemas.microsoft.com/office/drawing/2014/main" id="{9D91E436-352A-862C-D12C-B9A0C28D3E6C}"/>
               </a:ext>
             </a:extLst>
           </p:cNvPr>
@@ -2021,7 +2021,7 @@
           <p:cNvPr id="7" name="日付プレースホルダー 6">
             <a:extLst>
               <a:ext uri="{FF2B5EF4-FFF2-40B4-BE49-F238E27FC236}">
-                <a16:creationId xmlns:a16="http://schemas.microsoft.com/office/drawing/2014/main" id="{9C4FEFE7-13AF-059E-EF39-E09319610903}"/>
+                <a16:creationId xmlns:a16="http://schemas.microsoft.com/office/drawing/2014/main" id="{E689F21E-E3FA-373B-6014-FF08AB19A7B0}"/>
               </a:ext>
             </a:extLst>
           </p:cNvPr>
@@ -2037,7 +2037,7 @@
           <a:bodyPr/>
           <a:lstStyle/>
           <a:p>
-            <a:fld id="{E50A1A90-6580-437D-A9EF-B1C14ABC181D}" type="datetimeFigureOut">
+            <a:fld id="{BD358D7C-FF40-44A0-9CCA-82C00B9D490E}" type="datetimeFigureOut">
               <a:rPr kumimoji="1" lang="ja-JP" altLang="en-US" smtClean="0"/>
               <a:t>2026/7/30</a:t>
             </a:fld>
@@ -2050,7 +2050,7 @@
           <p:cNvPr id="8" name="フッター プレースホルダー 7">
             <a:extLst>
               <a:ext uri="{FF2B5EF4-FFF2-40B4-BE49-F238E27FC236}">
-                <a16:creationId xmlns:a16="http://schemas.microsoft.com/office/drawing/2014/main" id="{B32BEB9B-9009-1B5C-79A1-F432AF5EE9F1}"/>
+                <a16:creationId xmlns:a16="http://schemas.microsoft.com/office/drawing/2014/main" id="{7BB05F51-EDBA-1E8F-2810-C4681EA04DA3}"/>
               </a:ext>
             </a:extLst>
           </p:cNvPr>
@@ -2075,7 +2075,7 @@
           <p:cNvPr id="9" name="スライド番号プレースホルダー 8">
             <a:extLst>
               <a:ext uri="{FF2B5EF4-FFF2-40B4-BE49-F238E27FC236}">
-                <a16:creationId xmlns:a16="http://schemas.microsoft.com/office/drawing/2014/main" id="{D7DE9730-623B-ECB4-14B5-6666C72774A6}"/>
+                <a16:creationId xmlns:a16="http://schemas.microsoft.com/office/drawing/2014/main" id="{8DC4C1F1-222D-79A8-00C8-0669278B6E0E}"/>
               </a:ext>
             </a:extLst>
           </p:cNvPr>
@@ -2091,7 +2091,7 @@
           <a:bodyPr/>
           <a:lstStyle/>
           <a:p>
-            <a:fld id="{A5097284-7268-4A6F-8A30-803EBC071BDE}" type="slidenum">
+            <a:fld id="{617B1015-0A55-49B0-9136-CCD481C01AE8}" type="slidenum">
               <a:rPr kumimoji="1" lang="ja-JP" altLang="en-US" smtClean="0"/>
               <a:t>‹#›</a:t>
             </a:fld>
@@ -2102,7 +2102,7 @@
     </p:spTree>
     <p:extLst>
       <p:ext uri="{BB962C8B-B14F-4D97-AF65-F5344CB8AC3E}">
-        <p14:creationId xmlns:p14="http://schemas.microsoft.com/office/powerpoint/2010/main" val="3414523103"/>
+        <p14:creationId xmlns:p14="http://schemas.microsoft.com/office/powerpoint/2010/main" val="2813624355"/>
       </p:ext>
     </p:extLst>
   </p:cSld>
@@ -2134,7 +2134,7 @@
           <p:cNvPr id="2" name="タイトル 1">
             <a:extLst>
               <a:ext uri="{FF2B5EF4-FFF2-40B4-BE49-F238E27FC236}">
-                <a16:creationId xmlns:a16="http://schemas.microsoft.com/office/drawing/2014/main" id="{5FBDDF4B-7B32-D30D-4159-D4641EA4E15A}"/>
+                <a16:creationId xmlns:a16="http://schemas.microsoft.com/office/drawing/2014/main" id="{0FBA73EB-9AD1-EFEA-DC69-B19F2BA62838}"/>
               </a:ext>
             </a:extLst>
           </p:cNvPr>
@@ -2162,7 +2162,7 @@
           <p:cNvPr id="3" name="日付プレースホルダー 2">
             <a:extLst>
               <a:ext uri="{FF2B5EF4-FFF2-40B4-BE49-F238E27FC236}">
-                <a16:creationId xmlns:a16="http://schemas.microsoft.com/office/drawing/2014/main" id="{935B147E-4E18-8351-D5F9-73E66A38D162}"/>
+                <a16:creationId xmlns:a16="http://schemas.microsoft.com/office/drawing/2014/main" id="{EE004F96-13CC-E4E0-5652-FD7FBE01CBDF}"/>
               </a:ext>
             </a:extLst>
           </p:cNvPr>
@@ -2178,7 +2178,7 @@
           <a:bodyPr/>
           <a:lstStyle/>
           <a:p>
-            <a:fld id="{E50A1A90-6580-437D-A9EF-B1C14ABC181D}" type="datetimeFigureOut">
+            <a:fld id="{BD358D7C-FF40-44A0-9CCA-82C00B9D490E}" type="datetimeFigureOut">
               <a:rPr kumimoji="1" lang="ja-JP" altLang="en-US" smtClean="0"/>
               <a:t>2026/7/30</a:t>
             </a:fld>
@@ -2191,7 +2191,7 @@
           <p:cNvPr id="4" name="フッター プレースホルダー 3">
             <a:extLst>
               <a:ext uri="{FF2B5EF4-FFF2-40B4-BE49-F238E27FC236}">
-                <a16:creationId xmlns:a16="http://schemas.microsoft.com/office/drawing/2014/main" id="{44258B1A-BAD8-0973-0D3A-DD4C5DBCCCB2}"/>
+                <a16:creationId xmlns:a16="http://schemas.microsoft.com/office/drawing/2014/main" id="{A3F006A1-9DBD-2DC7-A316-67EC8244FFBD}"/>
               </a:ext>
             </a:extLst>
           </p:cNvPr>
@@ -2216,7 +2216,7 @@
           <p:cNvPr id="5" name="スライド番号プレースホルダー 4">
             <a:extLst>
               <a:ext uri="{FF2B5EF4-FFF2-40B4-BE49-F238E27FC236}">
-                <a16:creationId xmlns:a16="http://schemas.microsoft.com/office/drawing/2014/main" id="{75536A4A-1E20-8D31-41B9-8F2BA17BBBFD}"/>
+                <a16:creationId xmlns:a16="http://schemas.microsoft.com/office/drawing/2014/main" id="{1BC1B28C-1A3C-54E8-937C-110F3FF7694D}"/>
               </a:ext>
             </a:extLst>
           </p:cNvPr>
@@ -2232,7 +2232,7 @@
           <a:bodyPr/>
           <a:lstStyle/>
           <a:p>
-            <a:fld id="{A5097284-7268-4A6F-8A30-803EBC071BDE}" type="slidenum">
+            <a:fld id="{617B1015-0A55-49B0-9136-CCD481C01AE8}" type="slidenum">
               <a:rPr kumimoji="1" lang="ja-JP" altLang="en-US" smtClean="0"/>
               <a:t>‹#›</a:t>
             </a:fld>
@@ -2243,7 +2243,7 @@
     </p:spTree>
     <p:extLst>
       <p:ext uri="{BB962C8B-B14F-4D97-AF65-F5344CB8AC3E}">
-        <p14:creationId xmlns:p14="http://schemas.microsoft.com/office/powerpoint/2010/main" val="81620340"/>
+        <p14:creationId xmlns:p14="http://schemas.microsoft.com/office/powerpoint/2010/main" val="3782036901"/>
       </p:ext>
     </p:extLst>
   </p:cSld>
@@ -2275,7 +2275,7 @@
           <p:cNvPr id="2" name="日付プレースホルダー 1">
             <a:extLst>
               <a:ext uri="{FF2B5EF4-FFF2-40B4-BE49-F238E27FC236}">
-                <a16:creationId xmlns:a16="http://schemas.microsoft.com/office/drawing/2014/main" id="{032D0989-03B9-47D5-FFBE-8EF1455D5BDA}"/>
+                <a16:creationId xmlns:a16="http://schemas.microsoft.com/office/drawing/2014/main" id="{08E0FF98-C6F4-D814-F3B8-02339F66FF68}"/>
               </a:ext>
             </a:extLst>
           </p:cNvPr>
@@ -2291,7 +2291,7 @@
           <a:bodyPr/>
           <a:lstStyle/>
           <a:p>
-            <a:fld id="{E50A1A90-6580-437D-A9EF-B1C14ABC181D}" type="datetimeFigureOut">
+            <a:fld id="{BD358D7C-FF40-44A0-9CCA-82C00B9D490E}" type="datetimeFigureOut">
               <a:rPr kumimoji="1" lang="ja-JP" altLang="en-US" smtClean="0"/>
               <a:t>2026/7/30</a:t>
             </a:fld>
@@ -2304,7 +2304,7 @@
           <p:cNvPr id="3" name="フッター プレースホルダー 2">
             <a:extLst>
               <a:ext uri="{FF2B5EF4-FFF2-40B4-BE49-F238E27FC236}">
-                <a16:creationId xmlns:a16="http://schemas.microsoft.com/office/drawing/2014/main" id="{EBAB9525-F538-CD3C-079C-59B47A233F53}"/>
+                <a16:creationId xmlns:a16="http://schemas.microsoft.com/office/drawing/2014/main" id="{1EF7C1DD-E5DC-E698-D04B-639B4DE21630}"/>
               </a:ext>
             </a:extLst>
           </p:cNvPr>
@@ -2329,7 +2329,7 @@
           <p:cNvPr id="4" name="スライド番号プレースホルダー 3">
             <a:extLst>
               <a:ext uri="{FF2B5EF4-FFF2-40B4-BE49-F238E27FC236}">
-                <a16:creationId xmlns:a16="http://schemas.microsoft.com/office/drawing/2014/main" id="{007525C4-11A3-E619-5069-CD3F1C1B5128}"/>
+                <a16:creationId xmlns:a16="http://schemas.microsoft.com/office/drawing/2014/main" id="{1C7473C5-0770-F61A-B790-18FEE69CA7D5}"/>
               </a:ext>
             </a:extLst>
           </p:cNvPr>
@@ -2345,7 +2345,7 @@
           <a:bodyPr/>
           <a:lstStyle/>
           <a:p>
-            <a:fld id="{A5097284-7268-4A6F-8A30-803EBC071BDE}" type="slidenum">
+            <a:fld id="{617B1015-0A55-49B0-9136-CCD481C01AE8}" type="slidenum">
               <a:rPr kumimoji="1" lang="ja-JP" altLang="en-US" smtClean="0"/>
               <a:t>‹#›</a:t>
             </a:fld>
@@ -2356,7 +2356,7 @@
     </p:spTree>
     <p:extLst>
       <p:ext uri="{BB962C8B-B14F-4D97-AF65-F5344CB8AC3E}">
-        <p14:creationId xmlns:p14="http://schemas.microsoft.com/office/powerpoint/2010/main" val="3907142714"/>
+        <p14:creationId xmlns:p14="http://schemas.microsoft.com/office/powerpoint/2010/main" val="2523292709"/>
       </p:ext>
     </p:extLst>
   </p:cSld>
@@ -2388,7 +2388,7 @@
           <p:cNvPr id="2" name="タイトル 1">
             <a:extLst>
               <a:ext uri="{FF2B5EF4-FFF2-40B4-BE49-F238E27FC236}">
-                <a16:creationId xmlns:a16="http://schemas.microsoft.com/office/drawing/2014/main" id="{023A0F10-893A-72C6-4394-55397BB40802}"/>
+                <a16:creationId xmlns:a16="http://schemas.microsoft.com/office/drawing/2014/main" id="{988C4854-611C-2969-C751-45E25FCEC949}"/>
               </a:ext>
             </a:extLst>
           </p:cNvPr>
@@ -2425,7 +2425,7 @@
           <p:cNvPr id="3" name="コンテンツ プレースホルダー 2">
             <a:extLst>
               <a:ext uri="{FF2B5EF4-FFF2-40B4-BE49-F238E27FC236}">
-                <a16:creationId xmlns:a16="http://schemas.microsoft.com/office/drawing/2014/main" id="{C4A3B10C-F392-09F0-A7D8-FDCAAFAC6A1F}"/>
+                <a16:creationId xmlns:a16="http://schemas.microsoft.com/office/drawing/2014/main" id="{E6013DEB-1C98-567B-3622-61C72761E0EB}"/>
               </a:ext>
             </a:extLst>
           </p:cNvPr>
@@ -2547,7 +2547,7 @@
           <p:cNvPr id="4" name="テキスト プレースホルダー 3">
             <a:extLst>
               <a:ext uri="{FF2B5EF4-FFF2-40B4-BE49-F238E27FC236}">
-                <a16:creationId xmlns:a16="http://schemas.microsoft.com/office/drawing/2014/main" id="{EC48A59A-0D2E-A7E3-EE0B-B8C66906CC1E}"/>
+                <a16:creationId xmlns:a16="http://schemas.microsoft.com/office/drawing/2014/main" id="{B7D2E451-4461-FA9C-DAFD-E4E3329DD052}"/>
               </a:ext>
             </a:extLst>
           </p:cNvPr>
@@ -2618,7 +2618,7 @@
           <p:cNvPr id="5" name="日付プレースホルダー 4">
             <a:extLst>
               <a:ext uri="{FF2B5EF4-FFF2-40B4-BE49-F238E27FC236}">
-                <a16:creationId xmlns:a16="http://schemas.microsoft.com/office/drawing/2014/main" id="{C600EC83-A8E8-FCF3-44EE-A87D67C2920F}"/>
+                <a16:creationId xmlns:a16="http://schemas.microsoft.com/office/drawing/2014/main" id="{8242F984-CE91-6BE4-3D6F-3FE9DBBE49B0}"/>
               </a:ext>
             </a:extLst>
           </p:cNvPr>
@@ -2634,7 +2634,7 @@
           <a:bodyPr/>
           <a:lstStyle/>
           <a:p>
-            <a:fld id="{E50A1A90-6580-437D-A9EF-B1C14ABC181D}" type="datetimeFigureOut">
+            <a:fld id="{BD358D7C-FF40-44A0-9CCA-82C00B9D490E}" type="datetimeFigureOut">
               <a:rPr kumimoji="1" lang="ja-JP" altLang="en-US" smtClean="0"/>
               <a:t>2026/7/30</a:t>
             </a:fld>
@@ -2647,7 +2647,7 @@
           <p:cNvPr id="6" name="フッター プレースホルダー 5">
             <a:extLst>
               <a:ext uri="{FF2B5EF4-FFF2-40B4-BE49-F238E27FC236}">
-                <a16:creationId xmlns:a16="http://schemas.microsoft.com/office/drawing/2014/main" id="{56C761B7-97BB-4B98-EB76-A09426CBB363}"/>
+                <a16:creationId xmlns:a16="http://schemas.microsoft.com/office/drawing/2014/main" id="{71AADA1E-46A1-C11F-CFDB-5895FBE3E7BE}"/>
               </a:ext>
             </a:extLst>
           </p:cNvPr>
@@ -2672,7 +2672,7 @@
           <p:cNvPr id="7" name="スライド番号プレースホルダー 6">
             <a:extLst>
               <a:ext uri="{FF2B5EF4-FFF2-40B4-BE49-F238E27FC236}">
-                <a16:creationId xmlns:a16="http://schemas.microsoft.com/office/drawing/2014/main" id="{25A8192F-DCAF-84D1-CF21-8F9C4812CD0A}"/>
+                <a16:creationId xmlns:a16="http://schemas.microsoft.com/office/drawing/2014/main" id="{F36DAA18-3054-1FF6-12EC-CC4B12578722}"/>
               </a:ext>
             </a:extLst>
           </p:cNvPr>
@@ -2688,7 +2688,7 @@
           <a:bodyPr/>
           <a:lstStyle/>
           <a:p>
-            <a:fld id="{A5097284-7268-4A6F-8A30-803EBC071BDE}" type="slidenum">
+            <a:fld id="{617B1015-0A55-49B0-9136-CCD481C01AE8}" type="slidenum">
               <a:rPr kumimoji="1" lang="ja-JP" altLang="en-US" smtClean="0"/>
               <a:t>‹#›</a:t>
             </a:fld>
@@ -2699,7 +2699,7 @@
     </p:spTree>
     <p:extLst>
       <p:ext uri="{BB962C8B-B14F-4D97-AF65-F5344CB8AC3E}">
-        <p14:creationId xmlns:p14="http://schemas.microsoft.com/office/powerpoint/2010/main" val="3538551228"/>
+        <p14:creationId xmlns:p14="http://schemas.microsoft.com/office/powerpoint/2010/main" val="2239169801"/>
       </p:ext>
     </p:extLst>
   </p:cSld>
@@ -2731,7 +2731,7 @@
           <p:cNvPr id="2" name="タイトル 1">
             <a:extLst>
               <a:ext uri="{FF2B5EF4-FFF2-40B4-BE49-F238E27FC236}">
-                <a16:creationId xmlns:a16="http://schemas.microsoft.com/office/drawing/2014/main" id="{474DAF35-2494-96A5-2438-F4CBA49F08B3}"/>
+                <a16:creationId xmlns:a16="http://schemas.microsoft.com/office/drawing/2014/main" id="{C49D6416-029B-D270-85DE-EEB101C58687}"/>
               </a:ext>
             </a:extLst>
           </p:cNvPr>
@@ -2768,7 +2768,7 @@
           <p:cNvPr id="3" name="図プレースホルダー 2">
             <a:extLst>
               <a:ext uri="{FF2B5EF4-FFF2-40B4-BE49-F238E27FC236}">
-                <a16:creationId xmlns:a16="http://schemas.microsoft.com/office/drawing/2014/main" id="{DA313A88-35DE-CF24-FD67-89F35B9F6205}"/>
+                <a16:creationId xmlns:a16="http://schemas.microsoft.com/office/drawing/2014/main" id="{265AE7F8-1B38-9A47-50A4-84982DA8C37D}"/>
               </a:ext>
             </a:extLst>
           </p:cNvPr>
@@ -2835,7 +2835,7 @@
           <p:cNvPr id="4" name="テキスト プレースホルダー 3">
             <a:extLst>
               <a:ext uri="{FF2B5EF4-FFF2-40B4-BE49-F238E27FC236}">
-                <a16:creationId xmlns:a16="http://schemas.microsoft.com/office/drawing/2014/main" id="{C96D990F-9E61-CEEF-2999-694219D37162}"/>
+                <a16:creationId xmlns:a16="http://schemas.microsoft.com/office/drawing/2014/main" id="{AA1F42DF-BFBA-91CF-6914-E345D3B3CBAC}"/>
               </a:ext>
             </a:extLst>
           </p:cNvPr>
@@ -2906,7 +2906,7 @@
           <p:cNvPr id="5" name="日付プレースホルダー 4">
             <a:extLst>
               <a:ext uri="{FF2B5EF4-FFF2-40B4-BE49-F238E27FC236}">
-                <a16:creationId xmlns:a16="http://schemas.microsoft.com/office/drawing/2014/main" id="{BE17CCFC-901F-BE18-9FDB-196F6C055654}"/>
+                <a16:creationId xmlns:a16="http://schemas.microsoft.com/office/drawing/2014/main" id="{A9732585-5955-B580-CFBC-4608363EFAD2}"/>
               </a:ext>
             </a:extLst>
           </p:cNvPr>
@@ -2922,7 +2922,7 @@
           <a:bodyPr/>
           <a:lstStyle/>
           <a:p>
-            <a:fld id="{E50A1A90-6580-437D-A9EF-B1C14ABC181D}" type="datetimeFigureOut">
+            <a:fld id="{BD358D7C-FF40-44A0-9CCA-82C00B9D490E}" type="datetimeFigureOut">
               <a:rPr kumimoji="1" lang="ja-JP" altLang="en-US" smtClean="0"/>
               <a:t>2026/7/30</a:t>
             </a:fld>
@@ -2935,7 +2935,7 @@
           <p:cNvPr id="6" name="フッター プレースホルダー 5">
             <a:extLst>
               <a:ext uri="{FF2B5EF4-FFF2-40B4-BE49-F238E27FC236}">
-                <a16:creationId xmlns:a16="http://schemas.microsoft.com/office/drawing/2014/main" id="{68DCE38C-681C-6C6D-AA19-21F61C4349FF}"/>
+                <a16:creationId xmlns:a16="http://schemas.microsoft.com/office/drawing/2014/main" id="{7434387D-21FE-B270-0418-D170CF117D2F}"/>
               </a:ext>
             </a:extLst>
           </p:cNvPr>
@@ -2960,7 +2960,7 @@
           <p:cNvPr id="7" name="スライド番号プレースホルダー 6">
             <a:extLst>
               <a:ext uri="{FF2B5EF4-FFF2-40B4-BE49-F238E27FC236}">
-                <a16:creationId xmlns:a16="http://schemas.microsoft.com/office/drawing/2014/main" id="{6F222C84-2FAC-BCAB-FFF4-563A5F9365AB}"/>
+                <a16:creationId xmlns:a16="http://schemas.microsoft.com/office/drawing/2014/main" id="{4A2FBC4E-B5AE-39A1-4032-D9BB7D84CC1A}"/>
               </a:ext>
             </a:extLst>
           </p:cNvPr>
@@ -2976,7 +2976,7 @@
           <a:bodyPr/>
           <a:lstStyle/>
           <a:p>
-            <a:fld id="{A5097284-7268-4A6F-8A30-803EBC071BDE}" type="slidenum">
+            <a:fld id="{617B1015-0A55-49B0-9136-CCD481C01AE8}" type="slidenum">
               <a:rPr kumimoji="1" lang="ja-JP" altLang="en-US" smtClean="0"/>
               <a:t>‹#›</a:t>
             </a:fld>
@@ -2987,7 +2987,7 @@
     </p:spTree>
     <p:extLst>
       <p:ext uri="{BB962C8B-B14F-4D97-AF65-F5344CB8AC3E}">
-        <p14:creationId xmlns:p14="http://schemas.microsoft.com/office/powerpoint/2010/main" val="2214323082"/>
+        <p14:creationId xmlns:p14="http://schemas.microsoft.com/office/powerpoint/2010/main" val="1839630153"/>
       </p:ext>
     </p:extLst>
   </p:cSld>
@@ -3024,7 +3024,7 @@
           <p:cNvPr id="2" name="タイトル プレースホルダー 1">
             <a:extLst>
               <a:ext uri="{FF2B5EF4-FFF2-40B4-BE49-F238E27FC236}">
-                <a16:creationId xmlns:a16="http://schemas.microsoft.com/office/drawing/2014/main" id="{0A943403-F663-7191-AC41-844A609B23A4}"/>
+                <a16:creationId xmlns:a16="http://schemas.microsoft.com/office/drawing/2014/main" id="{DC213E78-DBF5-BCD5-5F05-A12CF1B492A4}"/>
               </a:ext>
             </a:extLst>
           </p:cNvPr>
@@ -3062,7 +3062,7 @@
           <p:cNvPr id="3" name="テキスト プレースホルダー 2">
             <a:extLst>
               <a:ext uri="{FF2B5EF4-FFF2-40B4-BE49-F238E27FC236}">
-                <a16:creationId xmlns:a16="http://schemas.microsoft.com/office/drawing/2014/main" id="{8ACB42C5-D609-F0A1-628D-1EF2BF39D6C3}"/>
+                <a16:creationId xmlns:a16="http://schemas.microsoft.com/office/drawing/2014/main" id="{6127919E-EA80-A724-1AB1-C6031CAEC2AD}"/>
               </a:ext>
             </a:extLst>
           </p:cNvPr>
@@ -3161,7 +3161,7 @@
           <p:cNvPr id="4" name="日付プレースホルダー 3">
             <a:extLst>
               <a:ext uri="{FF2B5EF4-FFF2-40B4-BE49-F238E27FC236}">
-                <a16:creationId xmlns:a16="http://schemas.microsoft.com/office/drawing/2014/main" id="{436FE9AA-9BC7-889D-0618-BC1E4A74DEF6}"/>
+                <a16:creationId xmlns:a16="http://schemas.microsoft.com/office/drawing/2014/main" id="{151C2404-1110-A102-107C-67101FB959F3}"/>
               </a:ext>
             </a:extLst>
           </p:cNvPr>
@@ -3195,7 +3195,7 @@
             </a:lvl1pPr>
           </a:lstStyle>
           <a:p>
-            <a:fld id="{E50A1A90-6580-437D-A9EF-B1C14ABC181D}" type="datetimeFigureOut">
+            <a:fld id="{BD358D7C-FF40-44A0-9CCA-82C00B9D490E}" type="datetimeFigureOut">
               <a:rPr kumimoji="1" lang="ja-JP" altLang="en-US" smtClean="0"/>
               <a:t>2026/7/30</a:t>
             </a:fld>
@@ -3208,7 +3208,7 @@
           <p:cNvPr id="5" name="フッター プレースホルダー 4">
             <a:extLst>
               <a:ext uri="{FF2B5EF4-FFF2-40B4-BE49-F238E27FC236}">
-                <a16:creationId xmlns:a16="http://schemas.microsoft.com/office/drawing/2014/main" id="{AEF7F4FD-DF1F-BB7E-4630-5926A795E34B}"/>
+                <a16:creationId xmlns:a16="http://schemas.microsoft.com/office/drawing/2014/main" id="{AB981CC6-6ED8-99A5-766E-9E46FC820907}"/>
               </a:ext>
             </a:extLst>
           </p:cNvPr>
@@ -3251,7 +3251,7 @@
           <p:cNvPr id="6" name="スライド番号プレースホルダー 5">
             <a:extLst>
               <a:ext uri="{FF2B5EF4-FFF2-40B4-BE49-F238E27FC236}">
-                <a16:creationId xmlns:a16="http://schemas.microsoft.com/office/drawing/2014/main" id="{000F796D-96AD-D942-79A6-FB0B817AF138}"/>
+                <a16:creationId xmlns:a16="http://schemas.microsoft.com/office/drawing/2014/main" id="{C1762628-D743-4024-24CF-98C4BAA4DC98}"/>
               </a:ext>
             </a:extLst>
           </p:cNvPr>
@@ -3285,7 +3285,7 @@
             </a:lvl1pPr>
           </a:lstStyle>
           <a:p>
-            <a:fld id="{A5097284-7268-4A6F-8A30-803EBC071BDE}" type="slidenum">
+            <a:fld id="{617B1015-0A55-49B0-9136-CCD481C01AE8}" type="slidenum">
               <a:rPr kumimoji="1" lang="ja-JP" altLang="en-US" smtClean="0"/>
               <a:t>‹#›</a:t>
             </a:fld>
@@ -3296,7 +3296,7 @@
     </p:spTree>
     <p:extLst>
       <p:ext uri="{BB962C8B-B14F-4D97-AF65-F5344CB8AC3E}">
-        <p14:creationId xmlns:p14="http://schemas.microsoft.com/office/powerpoint/2010/main" val="945996044"/>
+        <p14:creationId xmlns:p14="http://schemas.microsoft.com/office/powerpoint/2010/main" val="3601095888"/>
       </p:ext>
     </p:extLst>
   </p:cSld>
@@ -3619,7 +3619,7 @@
           <p:cNvPr id="2" name="テキスト ボックス 1">
             <a:extLst>
               <a:ext uri="{FF2B5EF4-FFF2-40B4-BE49-F238E27FC236}">
-                <a16:creationId xmlns:a16="http://schemas.microsoft.com/office/drawing/2014/main" id="{61A1019D-CFF8-7E39-57F9-B9CED661A774}"/>
+                <a16:creationId xmlns:a16="http://schemas.microsoft.com/office/drawing/2014/main" id="{282B85A4-A2C2-A0AE-A33B-29DBA9169B66}"/>
               </a:ext>
             </a:extLst>
           </p:cNvPr>
@@ -3665,7 +3665,7 @@
           <p:cNvPr id="3" name="テキスト ボックス 2">
             <a:extLst>
               <a:ext uri="{FF2B5EF4-FFF2-40B4-BE49-F238E27FC236}">
-                <a16:creationId xmlns:a16="http://schemas.microsoft.com/office/drawing/2014/main" id="{6258A9D0-5740-5A7B-540C-F1D15CFFC150}"/>
+                <a16:creationId xmlns:a16="http://schemas.microsoft.com/office/drawing/2014/main" id="{DCF56A9A-6F2D-17FA-AE6E-B49AF7FC5D70}"/>
               </a:ext>
             </a:extLst>
           </p:cNvPr>
@@ -3714,7 +3714,7 @@
           <p:cNvPr id="4" name="テキスト ボックス 3">
             <a:extLst>
               <a:ext uri="{FF2B5EF4-FFF2-40B4-BE49-F238E27FC236}">
-                <a16:creationId xmlns:a16="http://schemas.microsoft.com/office/drawing/2014/main" id="{8E2DE095-8BC3-9118-C229-01AF4A053C04}"/>
+                <a16:creationId xmlns:a16="http://schemas.microsoft.com/office/drawing/2014/main" id="{99E6EB49-9B43-0B6E-D22D-B7242CEA5911}"/>
               </a:ext>
             </a:extLst>
           </p:cNvPr>
@@ -3754,7 +3754,7 @@
           <p:cNvPr id="5" name="テキスト ボックス 4">
             <a:extLst>
               <a:ext uri="{FF2B5EF4-FFF2-40B4-BE49-F238E27FC236}">
-                <a16:creationId xmlns:a16="http://schemas.microsoft.com/office/drawing/2014/main" id="{7B12BA7A-2999-3440-EFBA-CE93BDD867CA}"/>
+                <a16:creationId xmlns:a16="http://schemas.microsoft.com/office/drawing/2014/main" id="{BF28C2B4-CF80-30AF-24A3-E73AF729F3A1}"/>
               </a:ext>
             </a:extLst>
           </p:cNvPr>
@@ -3801,7 +3801,7 @@
             <a:hlinkClick r:id="" action="ppaction://media"/>
             <a:extLst>
               <a:ext uri="{FF2B5EF4-FFF2-40B4-BE49-F238E27FC236}">
-                <a16:creationId xmlns:a16="http://schemas.microsoft.com/office/drawing/2014/main" id="{D9C8653B-A01B-C971-1EF3-520CFC2332EF}"/>
+                <a16:creationId xmlns:a16="http://schemas.microsoft.com/office/drawing/2014/main" id="{D5412AA8-E009-020E-063F-C7C3B8970E3D}"/>
               </a:ext>
             </a:extLst>
           </p:cNvPr>
@@ -3836,7 +3836,7 @@
     </p:spTree>
     <p:extLst>
       <p:ext uri="{BB962C8B-B14F-4D97-AF65-F5344CB8AC3E}">
-        <p14:creationId xmlns:p14="http://schemas.microsoft.com/office/powerpoint/2010/main" val="2643823856"/>
+        <p14:creationId xmlns:p14="http://schemas.microsoft.com/office/powerpoint/2010/main" val="3518258006"/>
       </p:ext>
     </p:extLst>
   </p:cSld>
@@ -3960,7 +3960,7 @@
           <p:cNvPr id="2" name="テキスト ボックス 1">
             <a:extLst>
               <a:ext uri="{FF2B5EF4-FFF2-40B4-BE49-F238E27FC236}">
-                <a16:creationId xmlns:a16="http://schemas.microsoft.com/office/drawing/2014/main" id="{01C1F2A7-638B-8091-852A-754537C63954}"/>
+                <a16:creationId xmlns:a16="http://schemas.microsoft.com/office/drawing/2014/main" id="{DDC962A7-B8F4-1A51-9654-F1E78CCF3072}"/>
               </a:ext>
             </a:extLst>
           </p:cNvPr>
@@ -4006,7 +4006,7 @@
           <p:cNvPr id="3" name="テキスト ボックス 2">
             <a:extLst>
               <a:ext uri="{FF2B5EF4-FFF2-40B4-BE49-F238E27FC236}">
-                <a16:creationId xmlns:a16="http://schemas.microsoft.com/office/drawing/2014/main" id="{90F07176-D968-24AE-4355-D478C81E3FA1}"/>
+                <a16:creationId xmlns:a16="http://schemas.microsoft.com/office/drawing/2014/main" id="{E9999232-C09A-C291-4A25-E4571C0AF368}"/>
               </a:ext>
             </a:extLst>
           </p:cNvPr>
@@ -4046,7 +4046,7 @@
           <p:cNvPr id="4" name="テキスト ボックス 3">
             <a:extLst>
               <a:ext uri="{FF2B5EF4-FFF2-40B4-BE49-F238E27FC236}">
-                <a16:creationId xmlns:a16="http://schemas.microsoft.com/office/drawing/2014/main" id="{EEE4E0D0-6260-662B-7829-A7EEA62433E3}"/>
+                <a16:creationId xmlns:a16="http://schemas.microsoft.com/office/drawing/2014/main" id="{56AB9177-B66F-05A8-C31B-B207FA813222}"/>
               </a:ext>
             </a:extLst>
           </p:cNvPr>
@@ -4076,14 +4076,17 @@
                 </a:solidFill>
                 <a:latin typeface="Arial" panose="020B0604020202020204" pitchFamily="34" charset="0"/>
               </a:rPr>
-              <a:t>About Laravel Laravel is a web application framework with expressive, elegant syntax</a:t>
-            </a:r>
-            <a:endParaRPr kumimoji="1" lang="ja-JP" altLang="en-US" sz="2000">
-              <a:solidFill>
-                <a:srgbClr val="333333"/>
-              </a:solidFill>
-              <a:latin typeface="Arial" panose="020B0604020202020204" pitchFamily="34" charset="0"/>
-            </a:endParaRPr>
+              <a:t>Kuruma Kaitori Kuchikomi</a:t>
+            </a:r>
+            <a:r>
+              <a:rPr kumimoji="1" lang="ja-JP" altLang="en-US" sz="2000">
+                <a:solidFill>
+                  <a:srgbClr val="333333"/>
+                </a:solidFill>
+                <a:latin typeface="Arial" panose="020B0604020202020204" pitchFamily="34" charset="0"/>
+              </a:rPr>
+              <a:t>の目的、構成、実装を公開コードから確認できるプロジェクトです。</a:t>
+            </a:r>
           </a:p>
         </p:txBody>
       </p:sp>
@@ -4092,7 +4095,7 @@
           <p:cNvPr id="5" name="テキスト ボックス 4">
             <a:extLst>
               <a:ext uri="{FF2B5EF4-FFF2-40B4-BE49-F238E27FC236}">
-                <a16:creationId xmlns:a16="http://schemas.microsoft.com/office/drawing/2014/main" id="{DECA561B-4562-CDB6-A2E2-A6DF56BCB3C9}"/>
+                <a16:creationId xmlns:a16="http://schemas.microsoft.com/office/drawing/2014/main" id="{9B746793-262C-B3B7-24DC-753ACA74A1B1}"/>
               </a:ext>
             </a:extLst>
           </p:cNvPr>
@@ -4139,7 +4142,7 @@
             <a:hlinkClick r:id="" action="ppaction://media"/>
             <a:extLst>
               <a:ext uri="{FF2B5EF4-FFF2-40B4-BE49-F238E27FC236}">
-                <a16:creationId xmlns:a16="http://schemas.microsoft.com/office/drawing/2014/main" id="{7530FB7A-CD0F-A420-10B9-F42A24C395B8}"/>
+                <a16:creationId xmlns:a16="http://schemas.microsoft.com/office/drawing/2014/main" id="{2C47087C-001D-5BDE-9CC3-9250F4B8E576}"/>
               </a:ext>
             </a:extLst>
           </p:cNvPr>
@@ -4174,7 +4177,7 @@
     </p:spTree>
     <p:extLst>
       <p:ext uri="{BB962C8B-B14F-4D97-AF65-F5344CB8AC3E}">
-        <p14:creationId xmlns:p14="http://schemas.microsoft.com/office/powerpoint/2010/main" val="3893765703"/>
+        <p14:creationId xmlns:p14="http://schemas.microsoft.com/office/powerpoint/2010/main" val="355263894"/>
       </p:ext>
     </p:extLst>
   </p:cSld>
@@ -4217,7 +4220,7 @@
                                   <p:childTnLst>
                                     <p:cmd type="call" cmd="playFrom(0.0)">
                                       <p:cBhvr>
-                                        <p:cTn id="6" dur="7780" fill="hold"/>
+                                        <p:cTn id="6" dur="7596" fill="hold"/>
                                         <p:tgtEl>
                                           <p:spTgt spid="6"/>
                                         </p:tgtEl>
@@ -4298,7 +4301,7 @@
           <p:cNvPr id="2" name="テキスト ボックス 1">
             <a:extLst>
               <a:ext uri="{FF2B5EF4-FFF2-40B4-BE49-F238E27FC236}">
-                <a16:creationId xmlns:a16="http://schemas.microsoft.com/office/drawing/2014/main" id="{F9F547F9-60C4-5CD7-0703-B898E060C01B}"/>
+                <a16:creationId xmlns:a16="http://schemas.microsoft.com/office/drawing/2014/main" id="{69BB77F8-A66C-0480-1A1D-11C409ACAA36}"/>
               </a:ext>
             </a:extLst>
           </p:cNvPr>
@@ -4344,7 +4347,7 @@
           <p:cNvPr id="3" name="テキスト ボックス 2">
             <a:extLst>
               <a:ext uri="{FF2B5EF4-FFF2-40B4-BE49-F238E27FC236}">
-                <a16:creationId xmlns:a16="http://schemas.microsoft.com/office/drawing/2014/main" id="{A21564E2-73A9-2A34-DFC4-6B319119C38C}"/>
+                <a16:creationId xmlns:a16="http://schemas.microsoft.com/office/drawing/2014/main" id="{7AA33351-697D-62BD-6C00-5EA9E792BF16}"/>
               </a:ext>
             </a:extLst>
           </p:cNvPr>
@@ -4384,7 +4387,7 @@
           <p:cNvPr id="4" name="テキスト ボックス 3">
             <a:extLst>
               <a:ext uri="{FF2B5EF4-FFF2-40B4-BE49-F238E27FC236}">
-                <a16:creationId xmlns:a16="http://schemas.microsoft.com/office/drawing/2014/main" id="{DE268924-3625-BDB8-B982-6D580790992C}"/>
+                <a16:creationId xmlns:a16="http://schemas.microsoft.com/office/drawing/2014/main" id="{B282E236-C5DD-B406-323E-3F925FB23872}"/>
               </a:ext>
             </a:extLst>
           </p:cNvPr>
@@ -4497,7 +4500,7 @@
           <p:cNvPr id="5" name="テキスト ボックス 4">
             <a:extLst>
               <a:ext uri="{FF2B5EF4-FFF2-40B4-BE49-F238E27FC236}">
-                <a16:creationId xmlns:a16="http://schemas.microsoft.com/office/drawing/2014/main" id="{90EE62D7-E009-B6A4-EFE0-341C9C676DAE}"/>
+                <a16:creationId xmlns:a16="http://schemas.microsoft.com/office/drawing/2014/main" id="{3773DAA2-9A17-F468-4E17-7B4E0167BA6A}"/>
               </a:ext>
             </a:extLst>
           </p:cNvPr>
@@ -4544,7 +4547,7 @@
             <a:hlinkClick r:id="" action="ppaction://media"/>
             <a:extLst>
               <a:ext uri="{FF2B5EF4-FFF2-40B4-BE49-F238E27FC236}">
-                <a16:creationId xmlns:a16="http://schemas.microsoft.com/office/drawing/2014/main" id="{E940253D-F0BA-221F-F840-7CCF6DCB0F66}"/>
+                <a16:creationId xmlns:a16="http://schemas.microsoft.com/office/drawing/2014/main" id="{61AAC1E0-B2E3-5727-DCA1-1373069F76EC}"/>
               </a:ext>
             </a:extLst>
           </p:cNvPr>
@@ -4579,7 +4582,7 @@
     </p:spTree>
     <p:extLst>
       <p:ext uri="{BB962C8B-B14F-4D97-AF65-F5344CB8AC3E}">
-        <p14:creationId xmlns:p14="http://schemas.microsoft.com/office/powerpoint/2010/main" val="3099052550"/>
+        <p14:creationId xmlns:p14="http://schemas.microsoft.com/office/powerpoint/2010/main" val="4108036878"/>
       </p:ext>
     </p:extLst>
   </p:cSld>
@@ -4703,7 +4706,7 @@
           <p:cNvPr id="2" name="テキスト ボックス 1">
             <a:extLst>
               <a:ext uri="{FF2B5EF4-FFF2-40B4-BE49-F238E27FC236}">
-                <a16:creationId xmlns:a16="http://schemas.microsoft.com/office/drawing/2014/main" id="{9669DF97-30D2-228F-A61A-36C8CDCF6615}"/>
+                <a16:creationId xmlns:a16="http://schemas.microsoft.com/office/drawing/2014/main" id="{AB6F9471-81A2-A78B-E6D8-8DBF95E46D8C}"/>
               </a:ext>
             </a:extLst>
           </p:cNvPr>
@@ -4749,7 +4752,7 @@
           <p:cNvPr id="3" name="テキスト ボックス 2">
             <a:extLst>
               <a:ext uri="{FF2B5EF4-FFF2-40B4-BE49-F238E27FC236}">
-                <a16:creationId xmlns:a16="http://schemas.microsoft.com/office/drawing/2014/main" id="{2A99E5AA-E07B-9B4A-7440-8BE90B9B4808}"/>
+                <a16:creationId xmlns:a16="http://schemas.microsoft.com/office/drawing/2014/main" id="{421B4AA8-CEA3-B97F-10B3-01F5C1CC7723}"/>
               </a:ext>
             </a:extLst>
           </p:cNvPr>
@@ -4789,7 +4792,7 @@
           <p:cNvPr id="4" name="テキスト ボックス 3">
             <a:extLst>
               <a:ext uri="{FF2B5EF4-FFF2-40B4-BE49-F238E27FC236}">
-                <a16:creationId xmlns:a16="http://schemas.microsoft.com/office/drawing/2014/main" id="{99975BA9-9E9D-7E5E-ACA6-8CDE70422FD2}"/>
+                <a16:creationId xmlns:a16="http://schemas.microsoft.com/office/drawing/2014/main" id="{3F68AB37-7EC6-DE26-3584-96F6D1F3FB18}"/>
               </a:ext>
             </a:extLst>
           </p:cNvPr>
@@ -4899,7 +4902,7 @@
           <p:cNvPr id="5" name="テキスト ボックス 4">
             <a:extLst>
               <a:ext uri="{FF2B5EF4-FFF2-40B4-BE49-F238E27FC236}">
-                <a16:creationId xmlns:a16="http://schemas.microsoft.com/office/drawing/2014/main" id="{F86E4C3A-FC71-16B3-F784-A7272DE84761}"/>
+                <a16:creationId xmlns:a16="http://schemas.microsoft.com/office/drawing/2014/main" id="{7BDF2563-7BB4-B4CB-5BE9-ED4D9C522D05}"/>
               </a:ext>
             </a:extLst>
           </p:cNvPr>
@@ -4946,7 +4949,7 @@
             <a:hlinkClick r:id="" action="ppaction://media"/>
             <a:extLst>
               <a:ext uri="{FF2B5EF4-FFF2-40B4-BE49-F238E27FC236}">
-                <a16:creationId xmlns:a16="http://schemas.microsoft.com/office/drawing/2014/main" id="{BBF3D5E9-8DF6-6CFA-6837-C07609181756}"/>
+                <a16:creationId xmlns:a16="http://schemas.microsoft.com/office/drawing/2014/main" id="{A5A6DD44-DECC-B895-E001-B0D173F7BDDF}"/>
               </a:ext>
             </a:extLst>
           </p:cNvPr>
@@ -4981,7 +4984,7 @@
     </p:spTree>
     <p:extLst>
       <p:ext uri="{BB962C8B-B14F-4D97-AF65-F5344CB8AC3E}">
-        <p14:creationId xmlns:p14="http://schemas.microsoft.com/office/powerpoint/2010/main" val="1573792756"/>
+        <p14:creationId xmlns:p14="http://schemas.microsoft.com/office/powerpoint/2010/main" val="3579438362"/>
       </p:ext>
     </p:extLst>
   </p:cSld>
@@ -5105,7 +5108,7 @@
           <p:cNvPr id="2" name="テキスト ボックス 1">
             <a:extLst>
               <a:ext uri="{FF2B5EF4-FFF2-40B4-BE49-F238E27FC236}">
-                <a16:creationId xmlns:a16="http://schemas.microsoft.com/office/drawing/2014/main" id="{F6F7F9C5-769A-623A-7AF2-FF1BF3EC8C9E}"/>
+                <a16:creationId xmlns:a16="http://schemas.microsoft.com/office/drawing/2014/main" id="{5B6CA048-8565-5572-6045-DBB33440034E}"/>
               </a:ext>
             </a:extLst>
           </p:cNvPr>
@@ -5151,7 +5154,7 @@
           <p:cNvPr id="3" name="テキスト ボックス 2">
             <a:extLst>
               <a:ext uri="{FF2B5EF4-FFF2-40B4-BE49-F238E27FC236}">
-                <a16:creationId xmlns:a16="http://schemas.microsoft.com/office/drawing/2014/main" id="{1D96C9F9-2C3E-A42C-E289-BA181FE49571}"/>
+                <a16:creationId xmlns:a16="http://schemas.microsoft.com/office/drawing/2014/main" id="{8181A83F-5D3A-B799-593D-31090336FFF6}"/>
               </a:ext>
             </a:extLst>
           </p:cNvPr>
@@ -5191,7 +5194,7 @@
           <p:cNvPr id="4" name="テキスト ボックス 3">
             <a:extLst>
               <a:ext uri="{FF2B5EF4-FFF2-40B4-BE49-F238E27FC236}">
-                <a16:creationId xmlns:a16="http://schemas.microsoft.com/office/drawing/2014/main" id="{0ED69D2D-CCB3-7C41-43CE-B75081AD5294}"/>
+                <a16:creationId xmlns:a16="http://schemas.microsoft.com/office/drawing/2014/main" id="{800EB1A2-F9B9-AF40-D44E-4EFD82B76CB7}"/>
               </a:ext>
             </a:extLst>
           </p:cNvPr>
@@ -5215,58 +5218,13 @@
           <a:lstStyle/>
           <a:p>
             <a:r>
-              <a:rPr kumimoji="1" lang="en-US" altLang="ja-JP" sz="2000">
-                <a:solidFill>
-                  <a:srgbClr val="333333"/>
-                </a:solidFill>
-                <a:latin typeface="Arial" panose="020B0604020202020204" pitchFamily="34" charset="0"/>
-              </a:rPr>
-              <a:t>CheckPriceReportWatches: </a:t>
-            </a:r>
-            <a:r>
               <a:rPr kumimoji="1" lang="ja-JP" altLang="en-US" sz="2000">
                 <a:solidFill>
                   <a:srgbClr val="333333"/>
                 </a:solidFill>
                 <a:latin typeface="Arial" panose="020B0604020202020204" pitchFamily="34" charset="0"/>
               </a:rPr>
-              <a:t>検知カーソルを</a:t>
-            </a:r>
-            <a:r>
-              <a:rPr kumimoji="1" lang="en-US" altLang="ja-JP" sz="2000">
-                <a:solidFill>
-                  <a:srgbClr val="333333"/>
-                </a:solidFill>
-                <a:latin typeface="Arial" panose="020B0604020202020204" pitchFamily="34" charset="0"/>
-              </a:rPr>
-              <a:t>created_at</a:t>
-            </a:r>
-            <a:r>
-              <a:rPr kumimoji="1" lang="ja-JP" altLang="en-US" sz="2000">
-                <a:solidFill>
-                  <a:srgbClr val="333333"/>
-                </a:solidFill>
-                <a:latin typeface="Arial" panose="020B0604020202020204" pitchFamily="34" charset="0"/>
-              </a:rPr>
-              <a:t>から</a:t>
-            </a:r>
-            <a:r>
-              <a:rPr kumimoji="1" lang="en-US" altLang="ja-JP" sz="2000">
-                <a:solidFill>
-                  <a:srgbClr val="333333"/>
-                </a:solidFill>
-                <a:latin typeface="Arial" panose="020B0604020202020204" pitchFamily="34" charset="0"/>
-              </a:rPr>
-              <a:t>price_reports.id</a:t>
-            </a:r>
-            <a:r>
-              <a:rPr kumimoji="1" lang="ja-JP" altLang="en-US" sz="2000">
-                <a:solidFill>
-                  <a:srgbClr val="333333"/>
-                </a:solidFill>
-                <a:latin typeface="Arial" panose="020B0604020202020204" pitchFamily="34" charset="0"/>
-              </a:rPr>
-              <a:t>ベースに変更</a:t>
+              <a:t>直近のコミットでは、新機能の追加と実装強化が行われました。</a:t>
             </a:r>
           </a:p>
         </p:txBody>
@@ -5276,7 +5234,7 @@
           <p:cNvPr id="5" name="テキスト ボックス 4">
             <a:extLst>
               <a:ext uri="{FF2B5EF4-FFF2-40B4-BE49-F238E27FC236}">
-                <a16:creationId xmlns:a16="http://schemas.microsoft.com/office/drawing/2014/main" id="{9E38B34B-B1AE-49B9-F9A3-43B34A4A39BA}"/>
+                <a16:creationId xmlns:a16="http://schemas.microsoft.com/office/drawing/2014/main" id="{AAB15BC0-704D-86D6-A033-9593E732D19A}"/>
               </a:ext>
             </a:extLst>
           </p:cNvPr>
@@ -5323,7 +5281,7 @@
             <a:hlinkClick r:id="" action="ppaction://media"/>
             <a:extLst>
               <a:ext uri="{FF2B5EF4-FFF2-40B4-BE49-F238E27FC236}">
-                <a16:creationId xmlns:a16="http://schemas.microsoft.com/office/drawing/2014/main" id="{9315AC7E-5197-E359-06C7-99755B58E13F}"/>
+                <a16:creationId xmlns:a16="http://schemas.microsoft.com/office/drawing/2014/main" id="{9A18FC15-1B51-C5ED-F05E-4A01544B8640}"/>
               </a:ext>
             </a:extLst>
           </p:cNvPr>
@@ -5358,7 +5316,7 @@
     </p:spTree>
     <p:extLst>
       <p:ext uri="{BB962C8B-B14F-4D97-AF65-F5344CB8AC3E}">
-        <p14:creationId xmlns:p14="http://schemas.microsoft.com/office/powerpoint/2010/main" val="1356168961"/>
+        <p14:creationId xmlns:p14="http://schemas.microsoft.com/office/powerpoint/2010/main" val="3502739618"/>
       </p:ext>
     </p:extLst>
   </p:cSld>
@@ -5367,10 +5325,10 @@
   </p:clrMapOvr>
   <mc:AlternateContent xmlns:mc="http://schemas.openxmlformats.org/markup-compatibility/2006">
     <mc:Choice xmlns:p14="http://schemas.microsoft.com/office/powerpoint/2010/main" Requires="p14">
-      <p:transition spd="slow" p14:dur="2000" advTm="12000"/>
+      <p:transition spd="slow" p14:dur="2000" advTm="6000"/>
     </mc:Choice>
     <mc:Fallback>
-      <p:transition spd="slow" advTm="12000"/>
+      <p:transition spd="slow" advTm="6000"/>
     </mc:Fallback>
   </mc:AlternateContent>
   <p:timing>
@@ -5401,7 +5359,7 @@
                                   <p:childTnLst>
                                     <p:cmd type="call" cmd="playFrom(0.0)">
                                       <p:cBhvr>
-                                        <p:cTn id="6" dur="11594" fill="hold"/>
+                                        <p:cTn id="6" dur="5687" fill="hold"/>
                                         <p:tgtEl>
                                           <p:spTgt spid="6"/>
                                         </p:tgtEl>
@@ -5482,7 +5440,7 @@
           <p:cNvPr id="2" name="テキスト ボックス 1">
             <a:extLst>
               <a:ext uri="{FF2B5EF4-FFF2-40B4-BE49-F238E27FC236}">
-                <a16:creationId xmlns:a16="http://schemas.microsoft.com/office/drawing/2014/main" id="{527F5C0C-204A-C9E8-87B8-4C9A6462582E}"/>
+                <a16:creationId xmlns:a16="http://schemas.microsoft.com/office/drawing/2014/main" id="{C2BD8124-471A-9F5F-3CE0-CADE4A2F2EFD}"/>
               </a:ext>
             </a:extLst>
           </p:cNvPr>
@@ -5528,7 +5486,7 @@
           <p:cNvPr id="3" name="テキスト ボックス 2">
             <a:extLst>
               <a:ext uri="{FF2B5EF4-FFF2-40B4-BE49-F238E27FC236}">
-                <a16:creationId xmlns:a16="http://schemas.microsoft.com/office/drawing/2014/main" id="{E278E375-7BEA-0BA6-1E0C-7A52C36F4D44}"/>
+                <a16:creationId xmlns:a16="http://schemas.microsoft.com/office/drawing/2014/main" id="{4625CD39-7770-1C26-9313-2B2C3A09B7C8}"/>
               </a:ext>
             </a:extLst>
           </p:cNvPr>
@@ -5568,7 +5526,7 @@
           <p:cNvPr id="4" name="テキスト ボックス 3">
             <a:extLst>
               <a:ext uri="{FF2B5EF4-FFF2-40B4-BE49-F238E27FC236}">
-                <a16:creationId xmlns:a16="http://schemas.microsoft.com/office/drawing/2014/main" id="{93F2D91A-F077-09A6-7BEC-066F9CBE9F22}"/>
+                <a16:creationId xmlns:a16="http://schemas.microsoft.com/office/drawing/2014/main" id="{2FB894A9-CB6B-8E5F-1832-171FA4701920}"/>
               </a:ext>
             </a:extLst>
           </p:cNvPr>
@@ -5633,7 +5591,7 @@
           <p:cNvPr id="5" name="テキスト ボックス 4">
             <a:extLst>
               <a:ext uri="{FF2B5EF4-FFF2-40B4-BE49-F238E27FC236}">
-                <a16:creationId xmlns:a16="http://schemas.microsoft.com/office/drawing/2014/main" id="{43A02098-23A2-2276-8A24-E0E05E9B530E}"/>
+                <a16:creationId xmlns:a16="http://schemas.microsoft.com/office/drawing/2014/main" id="{9C434649-8A41-28B7-825A-C6B271C4689C}"/>
               </a:ext>
             </a:extLst>
           </p:cNvPr>
@@ -5680,7 +5638,7 @@
             <a:hlinkClick r:id="" action="ppaction://media"/>
             <a:extLst>
               <a:ext uri="{FF2B5EF4-FFF2-40B4-BE49-F238E27FC236}">
-                <a16:creationId xmlns:a16="http://schemas.microsoft.com/office/drawing/2014/main" id="{7107804B-DC10-CEB7-007C-C42A5B8247BA}"/>
+                <a16:creationId xmlns:a16="http://schemas.microsoft.com/office/drawing/2014/main" id="{9FEAA0D5-2F9D-1C03-F541-44C30212202F}"/>
               </a:ext>
             </a:extLst>
           </p:cNvPr>
@@ -5715,7 +5673,7 @@
     </p:spTree>
     <p:extLst>
       <p:ext uri="{BB962C8B-B14F-4D97-AF65-F5344CB8AC3E}">
-        <p14:creationId xmlns:p14="http://schemas.microsoft.com/office/powerpoint/2010/main" val="2493470017"/>
+        <p14:creationId xmlns:p14="http://schemas.microsoft.com/office/powerpoint/2010/main" val="831070293"/>
       </p:ext>
     </p:extLst>
   </p:cSld>
